--- a/Slides/CSC6103/VT-03 CPU Virtualization.pptx
+++ b/Slides/CSC6103/VT-03 CPU Virtualization.pptx
@@ -284,7 +284,7 @@
             <a:fld id="{45BDCE37-E9BE-4280-8D68-34E43D66CEDB}" type="datetimeFigureOut">
               <a:rPr lang="zh-TW" altLang="en-US" smtClean="0"/>
               <a:pPr/>
-              <a:t>2026/4/28</a:t>
+              <a:t>2026/9/24</a:t>
             </a:fld>
             <a:endParaRPr lang="zh-TW" altLang="en-US"/>
           </a:p>
@@ -451,7 +451,7 @@
             <a:fld id="{FBFBA883-381C-409E-9635-BB54B21745E4}" type="datetimeFigureOut">
               <a:rPr lang="zh-TW" altLang="en-US" smtClean="0"/>
               <a:pPr/>
-              <a:t>2026/4/28</a:t>
+              <a:t>2026/9/24</a:t>
             </a:fld>
             <a:endParaRPr lang="zh-TW" altLang="en-US"/>
           </a:p>
@@ -6427,33 +6427,21 @@
           <a:lstStyle/>
           <a:p>
             <a:r>
-              <a:rPr kumimoji="1" lang="en-US" altLang="zh-TW" sz="2200" dirty="0">
-                <a:latin typeface="Times New Roman" panose="02020603050405020304" pitchFamily="18" charset="0"/>
-                <a:cs typeface="Times New Roman" panose="02020603050405020304" pitchFamily="18" charset="0"/>
-              </a:rPr>
+              <a:rPr kumimoji="1" lang="en-US" altLang="zh-TW" sz="2200" dirty="0"/>
               <a:t>When Guest OS wants to execute sensitive instructions, the execution will be trapped to hypervisor which is running on privilege mode automatically.</a:t>
             </a:r>
           </a:p>
           <a:p>
             <a:pPr lvl="1"/>
             <a:r>
-              <a:rPr kumimoji="1" lang="en-US" altLang="zh-TW" sz="2000" dirty="0">
-                <a:latin typeface="Times New Roman" panose="02020603050405020304" pitchFamily="18" charset="0"/>
-                <a:cs typeface="Times New Roman" panose="02020603050405020304" pitchFamily="18" charset="0"/>
-              </a:rPr>
+              <a:rPr kumimoji="1" lang="en-US" altLang="zh-TW" sz="2000" dirty="0"/>
               <a:t>By this way, we can make sure that there is no chance for Guest OS to change any important hardware resource directly.  All important hardware resource is under management by hypervisor.</a:t>
             </a:r>
-            <a:endParaRPr kumimoji="1" lang="zh-TW" altLang="en-US" sz="2000" dirty="0">
-              <a:latin typeface="Times New Roman" panose="02020603050405020304" pitchFamily="18" charset="0"/>
-              <a:cs typeface="Times New Roman" panose="02020603050405020304" pitchFamily="18" charset="0"/>
-            </a:endParaRPr>
-          </a:p>
-          <a:p>
-            <a:r>
-              <a:rPr kumimoji="1" lang="en-US" altLang="zh-TW" sz="2200" dirty="0">
-                <a:latin typeface="Times New Roman" panose="02020603050405020304" pitchFamily="18" charset="0"/>
-                <a:cs typeface="Times New Roman" panose="02020603050405020304" pitchFamily="18" charset="0"/>
-              </a:rPr>
+            <a:endParaRPr kumimoji="1" lang="zh-TW" altLang="en-US" sz="2000" dirty="0"/>
+          </a:p>
+          <a:p>
+            <a:r>
+              <a:rPr kumimoji="1" lang="en-US" altLang="zh-TW" sz="2200" dirty="0"/>
               <a:t>Example</a:t>
             </a:r>
           </a:p>
@@ -6474,7 +6462,10 @@
           <a:p>
             <a:pPr lvl="2"/>
             <a:r>
-              <a:rPr kumimoji="1" lang="en-US" altLang="zh-TW" sz="1800" dirty="0"/>
+              <a:rPr kumimoji="1" lang="en-US" altLang="zh-TW" sz="1800" dirty="0">
+                <a:latin typeface="Times New Roman" panose="02020603050405020304" pitchFamily="18" charset="0"/>
+                <a:cs typeface="Times New Roman" panose="02020603050405020304" pitchFamily="18" charset="0"/>
+              </a:rPr>
               <a:t>CPU for IBM mainframe</a:t>
             </a:r>
           </a:p>
@@ -6694,31 +6685,52 @@
               <a:buChar char="l"/>
             </a:pPr>
             <a:r>
-              <a:rPr kumimoji="1" lang="en-US" altLang="zh-TW" sz="2100" dirty="0"/>
+              <a:rPr kumimoji="1" lang="en-US" altLang="zh-TW" sz="2100" dirty="0">
+                <a:latin typeface="Times New Roman" panose="02020603050405020304" pitchFamily="18" charset="0"/>
+                <a:cs typeface="Times New Roman" panose="02020603050405020304" pitchFamily="18" charset="0"/>
+              </a:rPr>
               <a:t>Some</a:t>
             </a:r>
             <a:r>
-              <a:rPr kumimoji="1" lang="zh-TW" altLang="en-US" sz="2100" dirty="0"/>
-              <a:t> </a:t>
-            </a:r>
-            <a:r>
-              <a:rPr kumimoji="1" lang="en-US" altLang="zh-TW" sz="2100" dirty="0"/>
+              <a:rPr kumimoji="1" lang="zh-TW" altLang="en-US" sz="2100" dirty="0">
+                <a:latin typeface="Times New Roman" panose="02020603050405020304" pitchFamily="18" charset="0"/>
+                <a:cs typeface="Times New Roman" panose="02020603050405020304" pitchFamily="18" charset="0"/>
+              </a:rPr>
+              <a:t> </a:t>
+            </a:r>
+            <a:r>
+              <a:rPr kumimoji="1" lang="en-US" altLang="zh-TW" sz="2100" dirty="0">
+                <a:latin typeface="Times New Roman" panose="02020603050405020304" pitchFamily="18" charset="0"/>
+                <a:cs typeface="Times New Roman" panose="02020603050405020304" pitchFamily="18" charset="0"/>
+              </a:rPr>
               <a:t>sensitive</a:t>
             </a:r>
             <a:r>
-              <a:rPr kumimoji="1" lang="zh-TW" altLang="en-US" sz="2100" dirty="0"/>
-              <a:t> </a:t>
-            </a:r>
-            <a:r>
-              <a:rPr kumimoji="1" lang="en-US" altLang="zh-TW" sz="2100" dirty="0"/>
+              <a:rPr kumimoji="1" lang="zh-TW" altLang="en-US" sz="2100" dirty="0">
+                <a:latin typeface="Times New Roman" panose="02020603050405020304" pitchFamily="18" charset="0"/>
+                <a:cs typeface="Times New Roman" panose="02020603050405020304" pitchFamily="18" charset="0"/>
+              </a:rPr>
+              <a:t> </a:t>
+            </a:r>
+            <a:r>
+              <a:rPr kumimoji="1" lang="en-US" altLang="zh-TW" sz="2100" dirty="0">
+                <a:latin typeface="Times New Roman" panose="02020603050405020304" pitchFamily="18" charset="0"/>
+                <a:cs typeface="Times New Roman" panose="02020603050405020304" pitchFamily="18" charset="0"/>
+              </a:rPr>
               <a:t>are</a:t>
             </a:r>
             <a:r>
-              <a:rPr kumimoji="1" lang="zh-TW" altLang="en-US" sz="2100" dirty="0"/>
-              <a:t> </a:t>
-            </a:r>
-            <a:r>
-              <a:rPr kumimoji="1" lang="en-US" altLang="zh-TW" sz="2100" dirty="0"/>
+              <a:rPr kumimoji="1" lang="zh-TW" altLang="en-US" sz="2100" dirty="0">
+                <a:latin typeface="Times New Roman" panose="02020603050405020304" pitchFamily="18" charset="0"/>
+                <a:cs typeface="Times New Roman" panose="02020603050405020304" pitchFamily="18" charset="0"/>
+              </a:rPr>
+              <a:t> </a:t>
+            </a:r>
+            <a:r>
+              <a:rPr kumimoji="1" lang="en-US" altLang="zh-TW" sz="2100" dirty="0">
+                <a:latin typeface="Times New Roman" panose="02020603050405020304" pitchFamily="18" charset="0"/>
+                <a:cs typeface="Times New Roman" panose="02020603050405020304" pitchFamily="18" charset="0"/>
+              </a:rPr>
               <a:t>non-privilege - </a:t>
             </a:r>
             <a:r>
@@ -6726,6 +6738,8 @@
                 <a:solidFill>
                   <a:srgbClr val="FF0000"/>
                 </a:solidFill>
+                <a:latin typeface="Times New Roman" panose="02020603050405020304" pitchFamily="18" charset="0"/>
+                <a:cs typeface="Times New Roman" panose="02020603050405020304" pitchFamily="18" charset="0"/>
               </a:rPr>
               <a:t>Non-Virtualizable</a:t>
             </a:r>
@@ -6734,6 +6748,8 @@
                 <a:solidFill>
                   <a:srgbClr val="FF0000"/>
                 </a:solidFill>
+                <a:latin typeface="Times New Roman" panose="02020603050405020304" pitchFamily="18" charset="0"/>
+                <a:cs typeface="Times New Roman" panose="02020603050405020304" pitchFamily="18" charset="0"/>
               </a:rPr>
               <a:t> </a:t>
             </a:r>
@@ -6742,6 +6758,8 @@
                 <a:solidFill>
                   <a:srgbClr val="FF0000"/>
                 </a:solidFill>
+                <a:latin typeface="Times New Roman" panose="02020603050405020304" pitchFamily="18" charset="0"/>
+                <a:cs typeface="Times New Roman" panose="02020603050405020304" pitchFamily="18" charset="0"/>
               </a:rPr>
               <a:t>CPU</a:t>
             </a:r>
@@ -6749,6 +6767,8 @@
               <a:solidFill>
                 <a:srgbClr val="FF0000"/>
               </a:solidFill>
+              <a:latin typeface="Times New Roman" panose="02020603050405020304" pitchFamily="18" charset="0"/>
+              <a:cs typeface="Times New Roman" panose="02020603050405020304" pitchFamily="18" charset="0"/>
             </a:endParaRPr>
           </a:p>
         </p:txBody>
@@ -6802,7 +6822,7 @@
         </p:nvGrpSpPr>
         <p:grpSpPr>
           <a:xfrm>
-            <a:off x="2660894" y="1344998"/>
+            <a:off x="2660894" y="1421201"/>
             <a:ext cx="3283195" cy="3099173"/>
             <a:chOff x="2930402" y="1035410"/>
             <a:chExt cx="3283195" cy="3099173"/>
@@ -7142,7 +7162,7 @@
         </p:nvSpPr>
         <p:spPr>
           <a:xfrm>
-            <a:off x="947337" y="771859"/>
+            <a:off x="947337" y="822661"/>
             <a:ext cx="7249326" cy="707886"/>
           </a:xfrm>
           <a:prstGeom prst="rect">
@@ -7226,10 +7246,10 @@
       </p:sp>
       <p:grpSp>
         <p:nvGrpSpPr>
-          <p:cNvPr id="6" name="组合 5">
+          <p:cNvPr id="8" name="组合 7">
             <a:extLst>
               <a:ext uri="{FF2B5EF4-FFF2-40B4-BE49-F238E27FC236}">
-                <a16:creationId xmlns:a16="http://schemas.microsoft.com/office/drawing/2014/main" id="{EC31884E-2F76-A73B-E592-C8475BF2324F}"/>
+                <a16:creationId xmlns:a16="http://schemas.microsoft.com/office/drawing/2014/main" id="{22D3EE44-A909-84FA-9B6A-AF117999EACC}"/>
               </a:ext>
             </a:extLst>
           </p:cNvPr>
@@ -7238,18 +7258,18 @@
         </p:nvGrpSpPr>
         <p:grpSpPr>
           <a:xfrm>
-            <a:off x="2660894" y="1470124"/>
-            <a:ext cx="3283195" cy="3099173"/>
-            <a:chOff x="2930402" y="1035410"/>
-            <a:chExt cx="3283195" cy="3099173"/>
+            <a:off x="2700867" y="1618489"/>
+            <a:ext cx="3243222" cy="2950808"/>
+            <a:chOff x="2907579" y="1428749"/>
+            <a:chExt cx="4064721" cy="3200400"/>
           </a:xfrm>
         </p:grpSpPr>
         <p:grpSp>
           <p:nvGrpSpPr>
-            <p:cNvPr id="8" name="组合 7">
+            <p:cNvPr id="14" name="组合 13">
               <a:extLst>
                 <a:ext uri="{FF2B5EF4-FFF2-40B4-BE49-F238E27FC236}">
-                  <a16:creationId xmlns:a16="http://schemas.microsoft.com/office/drawing/2014/main" id="{22D3EE44-A909-84FA-9B6A-AF117999EACC}"/>
+                  <a16:creationId xmlns:a16="http://schemas.microsoft.com/office/drawing/2014/main" id="{865485D3-6453-D88C-FEC3-CC77F878EDD5}"/>
                 </a:ext>
               </a:extLst>
             </p:cNvPr>
@@ -7258,252 +7278,231 @@
           </p:nvGrpSpPr>
           <p:grpSpPr>
             <a:xfrm>
-              <a:off x="2930402" y="1035410"/>
-              <a:ext cx="3283195" cy="3099173"/>
-              <a:chOff x="2907579" y="1428749"/>
-              <a:chExt cx="4064721" cy="3200400"/>
+              <a:off x="2971800" y="1428749"/>
+              <a:ext cx="4000500" cy="3200400"/>
+              <a:chOff x="2971800" y="1428749"/>
+              <a:chExt cx="4000500" cy="3200400"/>
             </a:xfrm>
           </p:grpSpPr>
-          <p:grpSp>
-            <p:nvGrpSpPr>
-              <p:cNvPr id="14" name="组合 13">
+          <p:sp>
+            <p:nvSpPr>
+              <p:cNvPr id="18" name="套索 2">
                 <a:extLst>
                   <a:ext uri="{FF2B5EF4-FFF2-40B4-BE49-F238E27FC236}">
-                    <a16:creationId xmlns:a16="http://schemas.microsoft.com/office/drawing/2014/main" id="{865485D3-6453-D88C-FEC3-CC77F878EDD5}"/>
+                    <a16:creationId xmlns:a16="http://schemas.microsoft.com/office/drawing/2014/main" id="{39BE9D89-B5C0-4089-126C-53A161530EDB}"/>
                   </a:ext>
                 </a:extLst>
               </p:cNvPr>
-              <p:cNvGrpSpPr/>
-              <p:nvPr/>
-            </p:nvGrpSpPr>
-            <p:grpSpPr>
-              <a:xfrm>
-                <a:off x="2971800" y="1428749"/>
-                <a:ext cx="4000500" cy="3200400"/>
-                <a:chOff x="2971800" y="1428749"/>
-                <a:chExt cx="4000500" cy="3200400"/>
-              </a:xfrm>
-            </p:grpSpPr>
-            <p:sp>
-              <p:nvSpPr>
-                <p:cNvPr id="18" name="套索 2">
-                  <a:extLst>
-                    <a:ext uri="{FF2B5EF4-FFF2-40B4-BE49-F238E27FC236}">
-                      <a16:creationId xmlns:a16="http://schemas.microsoft.com/office/drawing/2014/main" id="{39BE9D89-B5C0-4089-126C-53A161530EDB}"/>
-                    </a:ext>
-                  </a:extLst>
-                </p:cNvPr>
-                <p:cNvSpPr/>
-                <p:nvPr/>
-              </p:nvSpPr>
-              <p:spPr>
-                <a:xfrm>
-                  <a:off x="2971800" y="1428749"/>
-                  <a:ext cx="4000500" cy="3200400"/>
-                </a:xfrm>
-                <a:prstGeom prst="chord">
-                  <a:avLst>
-                    <a:gd name="adj1" fmla="val 5389467"/>
-                    <a:gd name="adj2" fmla="val 16200000"/>
-                  </a:avLst>
-                </a:prstGeom>
-              </p:spPr>
-              <p:style>
-                <a:lnRef idx="0">
-                  <a:schemeClr val="accent3"/>
-                </a:lnRef>
-                <a:fillRef idx="3">
-                  <a:schemeClr val="accent3"/>
-                </a:fillRef>
-                <a:effectRef idx="3">
-                  <a:schemeClr val="accent3"/>
-                </a:effectRef>
-                <a:fontRef idx="minor">
-                  <a:schemeClr val="lt1"/>
-                </a:fontRef>
-              </p:style>
-              <p:txBody>
-                <a:bodyPr rtlCol="0" anchor="ctr"/>
-                <a:lstStyle/>
-                <a:p>
-                  <a:pPr algn="ctr"/>
-                  <a:endParaRPr kumimoji="1" lang="en-US" altLang="zh-TW" sz="1350" dirty="0"/>
-                </a:p>
-                <a:p>
-                  <a:pPr algn="ctr"/>
-                  <a:endParaRPr kumimoji="1" lang="zh-TW" altLang="en-US" sz="1350" dirty="0"/>
-                </a:p>
-              </p:txBody>
-            </p:sp>
-            <p:sp>
-              <p:nvSpPr>
-                <p:cNvPr id="19" name="套索 9">
-                  <a:extLst>
-                    <a:ext uri="{FF2B5EF4-FFF2-40B4-BE49-F238E27FC236}">
-                      <a16:creationId xmlns:a16="http://schemas.microsoft.com/office/drawing/2014/main" id="{FBE26606-98AB-B2DB-9105-48B5B2E29E15}"/>
-                    </a:ext>
-                  </a:extLst>
-                </p:cNvPr>
-                <p:cNvSpPr/>
-                <p:nvPr/>
-              </p:nvSpPr>
-              <p:spPr>
-                <a:xfrm rot="10800000">
-                  <a:off x="2971800" y="1428749"/>
-                  <a:ext cx="4000500" cy="3200400"/>
-                </a:xfrm>
-                <a:prstGeom prst="chord">
-                  <a:avLst>
-                    <a:gd name="adj1" fmla="val 5389467"/>
-                    <a:gd name="adj2" fmla="val 16200000"/>
-                  </a:avLst>
-                </a:prstGeom>
-              </p:spPr>
-              <p:style>
-                <a:lnRef idx="0">
-                  <a:schemeClr val="accent6"/>
-                </a:lnRef>
-                <a:fillRef idx="3">
-                  <a:schemeClr val="accent6"/>
-                </a:fillRef>
-                <a:effectRef idx="3">
-                  <a:schemeClr val="accent6"/>
-                </a:effectRef>
-                <a:fontRef idx="minor">
-                  <a:schemeClr val="lt1"/>
-                </a:fontRef>
-              </p:style>
-              <p:txBody>
-                <a:bodyPr rtlCol="0" anchor="ctr"/>
-                <a:lstStyle/>
-                <a:p>
-                  <a:pPr algn="ctr"/>
-                  <a:endParaRPr kumimoji="1" lang="zh-TW" altLang="en-US" sz="1350"/>
-                </a:p>
-              </p:txBody>
-            </p:sp>
-          </p:grpSp>
-          <p:sp>
-            <p:nvSpPr>
-              <p:cNvPr id="15" name="文字方塊 3">
-                <a:extLst>
-                  <a:ext uri="{FF2B5EF4-FFF2-40B4-BE49-F238E27FC236}">
-                    <a16:creationId xmlns:a16="http://schemas.microsoft.com/office/drawing/2014/main" id="{A2D611AA-21D7-A36A-BAAC-08A943DA4D41}"/>
-                  </a:ext>
-                </a:extLst>
-              </p:cNvPr>
-              <p:cNvSpPr txBox="1"/>
+              <p:cNvSpPr/>
               <p:nvPr/>
             </p:nvSpPr>
             <p:spPr>
               <a:xfrm>
-                <a:off x="2907579" y="2904291"/>
-                <a:ext cx="2242365" cy="388466"/>
+                <a:off x="2971800" y="1428749"/>
+                <a:ext cx="4000500" cy="3200400"/>
               </a:xfrm>
-              <a:prstGeom prst="rect">
-                <a:avLst/>
+              <a:prstGeom prst="chord">
+                <a:avLst>
+                  <a:gd name="adj1" fmla="val 5389467"/>
+                  <a:gd name="adj2" fmla="val 16200000"/>
+                </a:avLst>
               </a:prstGeom>
-              <a:noFill/>
             </p:spPr>
+            <p:style>
+              <a:lnRef idx="0">
+                <a:schemeClr val="accent3"/>
+              </a:lnRef>
+              <a:fillRef idx="3">
+                <a:schemeClr val="accent3"/>
+              </a:fillRef>
+              <a:effectRef idx="3">
+                <a:schemeClr val="accent3"/>
+              </a:effectRef>
+              <a:fontRef idx="minor">
+                <a:schemeClr val="lt1"/>
+              </a:fontRef>
+            </p:style>
             <p:txBody>
-              <a:bodyPr wrap="square" rtlCol="0">
-                <a:spAutoFit/>
-              </a:bodyPr>
+              <a:bodyPr rtlCol="0" anchor="ctr"/>
               <a:lstStyle/>
               <a:p>
-                <a:r>
-                  <a:rPr kumimoji="1" lang="en-US" altLang="zh-TW" sz="2000" dirty="0"/>
-                  <a:t>Non-Privilege</a:t>
-                </a:r>
-                <a:endParaRPr kumimoji="1" lang="zh-TW" altLang="en-US" sz="2000" dirty="0"/>
+                <a:pPr algn="ctr"/>
+                <a:endParaRPr kumimoji="1" lang="en-US" altLang="zh-TW" sz="1350" dirty="0"/>
+              </a:p>
+              <a:p>
+                <a:pPr algn="ctr"/>
+                <a:endParaRPr kumimoji="1" lang="zh-TW" altLang="en-US" sz="1350" dirty="0"/>
               </a:p>
             </p:txBody>
           </p:sp>
           <p:sp>
             <p:nvSpPr>
-              <p:cNvPr id="17" name="文字方塊 11">
+              <p:cNvPr id="19" name="套索 9">
                 <a:extLst>
                   <a:ext uri="{FF2B5EF4-FFF2-40B4-BE49-F238E27FC236}">
-                    <a16:creationId xmlns:a16="http://schemas.microsoft.com/office/drawing/2014/main" id="{646202D3-0D3D-950A-C51E-C2A67805BA45}"/>
+                    <a16:creationId xmlns:a16="http://schemas.microsoft.com/office/drawing/2014/main" id="{FBE26606-98AB-B2DB-9105-48B5B2E29E15}"/>
                   </a:ext>
                 </a:extLst>
               </p:cNvPr>
-              <p:cNvSpPr txBox="1"/>
+              <p:cNvSpPr/>
               <p:nvPr/>
             </p:nvSpPr>
             <p:spPr>
-              <a:xfrm>
-                <a:off x="5181860" y="2917242"/>
-                <a:ext cx="1543620" cy="413179"/>
+              <a:xfrm rot="10800000">
+                <a:off x="2971800" y="1428749"/>
+                <a:ext cx="4000500" cy="3200400"/>
               </a:xfrm>
-              <a:prstGeom prst="rect">
-                <a:avLst/>
+              <a:prstGeom prst="chord">
+                <a:avLst>
+                  <a:gd name="adj1" fmla="val 5389467"/>
+                  <a:gd name="adj2" fmla="val 16200000"/>
+                </a:avLst>
               </a:prstGeom>
-              <a:noFill/>
             </p:spPr>
+            <p:style>
+              <a:lnRef idx="0">
+                <a:schemeClr val="accent6"/>
+              </a:lnRef>
+              <a:fillRef idx="3">
+                <a:schemeClr val="accent6"/>
+              </a:fillRef>
+              <a:effectRef idx="3">
+                <a:schemeClr val="accent6"/>
+              </a:effectRef>
+              <a:fontRef idx="minor">
+                <a:schemeClr val="lt1"/>
+              </a:fontRef>
+            </p:style>
             <p:txBody>
-              <a:bodyPr wrap="square" rtlCol="0">
-                <a:spAutoFit/>
-              </a:bodyPr>
+              <a:bodyPr rtlCol="0" anchor="ctr"/>
               <a:lstStyle/>
               <a:p>
-                <a:r>
-                  <a:rPr kumimoji="1" lang="en-US" altLang="zh-TW" sz="2000" dirty="0"/>
-                  <a:t>Privilege</a:t>
-                </a:r>
-                <a:endParaRPr kumimoji="1" lang="zh-TW" altLang="en-US" sz="2000" dirty="0"/>
+                <a:pPr algn="ctr"/>
+                <a:endParaRPr kumimoji="1" lang="zh-TW" altLang="en-US" sz="1200" dirty="0"/>
               </a:p>
             </p:txBody>
           </p:sp>
         </p:grpSp>
         <p:sp>
           <p:nvSpPr>
-            <p:cNvPr id="13" name="圓角矩形 1">
+            <p:cNvPr id="15" name="文字方塊 3">
               <a:extLst>
                 <a:ext uri="{FF2B5EF4-FFF2-40B4-BE49-F238E27FC236}">
-                  <a16:creationId xmlns:a16="http://schemas.microsoft.com/office/drawing/2014/main" id="{78B8FF24-F8F8-8FA2-FD1F-D9F938B4B585}"/>
+                  <a16:creationId xmlns:a16="http://schemas.microsoft.com/office/drawing/2014/main" id="{A2D611AA-21D7-A36A-BAAC-08A943DA4D41}"/>
                 </a:ext>
               </a:extLst>
             </p:cNvPr>
-            <p:cNvSpPr/>
+            <p:cNvSpPr txBox="1"/>
             <p:nvPr/>
           </p:nvSpPr>
           <p:spPr>
             <a:xfrm>
-              <a:off x="3666388" y="3121131"/>
-              <a:ext cx="1811224" cy="400110"/>
+              <a:off x="2907579" y="2904291"/>
+              <a:ext cx="2242365" cy="388466"/>
             </a:xfrm>
-            <a:prstGeom prst="roundRect">
+            <a:prstGeom prst="rect">
               <a:avLst/>
             </a:prstGeom>
+            <a:noFill/>
           </p:spPr>
-          <p:style>
-            <a:lnRef idx="0">
-              <a:schemeClr val="accent1"/>
-            </a:lnRef>
-            <a:fillRef idx="3">
-              <a:schemeClr val="accent1"/>
-            </a:fillRef>
-            <a:effectRef idx="3">
-              <a:schemeClr val="accent1"/>
-            </a:effectRef>
-            <a:fontRef idx="minor">
-              <a:schemeClr val="lt1"/>
-            </a:fontRef>
-          </p:style>
           <p:txBody>
-            <a:bodyPr rtlCol="0" anchor="ctr"/>
+            <a:bodyPr wrap="square" rtlCol="0">
+              <a:spAutoFit/>
+            </a:bodyPr>
             <a:lstStyle/>
             <a:p>
-              <a:pPr algn="ctr"/>
               <a:r>
-                <a:rPr kumimoji="1" lang="en-US" altLang="zh-TW" sz="1350" dirty="0"/>
-                <a:t>Sensitive</a:t>
+                <a:rPr kumimoji="1" lang="en-US" altLang="zh-TW" sz="2000" dirty="0"/>
+                <a:t>Non-Privilege</a:t>
               </a:r>
+              <a:endParaRPr kumimoji="1" lang="zh-TW" altLang="en-US" sz="2000" dirty="0"/>
+            </a:p>
+          </p:txBody>
+        </p:sp>
+        <p:sp>
+          <p:nvSpPr>
+            <p:cNvPr id="17" name="文字方塊 11">
+              <a:extLst>
+                <a:ext uri="{FF2B5EF4-FFF2-40B4-BE49-F238E27FC236}">
+                  <a16:creationId xmlns:a16="http://schemas.microsoft.com/office/drawing/2014/main" id="{646202D3-0D3D-950A-C51E-C2A67805BA45}"/>
+                </a:ext>
+              </a:extLst>
+            </p:cNvPr>
+            <p:cNvSpPr txBox="1"/>
+            <p:nvPr/>
+          </p:nvSpPr>
+          <p:spPr>
+            <a:xfrm>
+              <a:off x="5181860" y="2917242"/>
+              <a:ext cx="1543620" cy="413179"/>
+            </a:xfrm>
+            <a:prstGeom prst="rect">
+              <a:avLst/>
+            </a:prstGeom>
+            <a:noFill/>
+          </p:spPr>
+          <p:txBody>
+            <a:bodyPr wrap="square" rtlCol="0">
+              <a:spAutoFit/>
+            </a:bodyPr>
+            <a:lstStyle/>
+            <a:p>
+              <a:r>
+                <a:rPr kumimoji="1" lang="en-US" altLang="zh-TW" sz="2000" dirty="0"/>
+                <a:t>Privilege</a:t>
+              </a:r>
+              <a:endParaRPr kumimoji="1" lang="zh-TW" altLang="en-US" sz="2000" dirty="0"/>
             </a:p>
           </p:txBody>
         </p:sp>
       </p:grpSp>
+      <p:sp>
+        <p:nvSpPr>
+          <p:cNvPr id="13" name="圓角矩形 1">
+            <a:extLst>
+              <a:ext uri="{FF2B5EF4-FFF2-40B4-BE49-F238E27FC236}">
+                <a16:creationId xmlns:a16="http://schemas.microsoft.com/office/drawing/2014/main" id="{78B8FF24-F8F8-8FA2-FD1F-D9F938B4B585}"/>
+              </a:ext>
+            </a:extLst>
+          </p:cNvPr>
+          <p:cNvSpPr/>
+          <p:nvPr/>
+        </p:nvSpPr>
+        <p:spPr>
+          <a:xfrm>
+            <a:off x="3434461" y="3604361"/>
+            <a:ext cx="1784502" cy="380956"/>
+          </a:xfrm>
+          <a:prstGeom prst="roundRect">
+            <a:avLst/>
+          </a:prstGeom>
+        </p:spPr>
+        <p:style>
+          <a:lnRef idx="0">
+            <a:schemeClr val="accent1"/>
+          </a:lnRef>
+          <a:fillRef idx="3">
+            <a:schemeClr val="accent1"/>
+          </a:fillRef>
+          <a:effectRef idx="3">
+            <a:schemeClr val="accent1"/>
+          </a:effectRef>
+          <a:fontRef idx="minor">
+            <a:schemeClr val="lt1"/>
+          </a:fontRef>
+        </p:style>
+        <p:txBody>
+          <a:bodyPr rtlCol="0" anchor="ctr"/>
+          <a:lstStyle/>
+          <a:p>
+            <a:pPr algn="ctr"/>
+            <a:r>
+              <a:rPr kumimoji="1" lang="en-US" altLang="zh-TW" sz="1350" dirty="0"/>
+              <a:t>Sensitive</a:t>
+            </a:r>
+          </a:p>
+        </p:txBody>
+      </p:sp>
       <p:sp>
         <p:nvSpPr>
           <p:cNvPr id="16" name="圓角矩形 15"/>
@@ -7793,246 +7792,154 @@
         </p:nvSpPr>
         <p:spPr>
           <a:xfrm>
-            <a:off x="827773" y="845941"/>
-            <a:ext cx="7228572" cy="3829050"/>
+            <a:off x="933651" y="820539"/>
+            <a:ext cx="7526868" cy="3751459"/>
           </a:xfrm>
         </p:spPr>
         <p:txBody>
           <a:bodyPr>
-            <a:normAutofit fontScale="77500" lnSpcReduction="20000"/>
+            <a:noAutofit/>
           </a:bodyPr>
           <a:lstStyle/>
           <a:p>
-            <a:r>
-              <a:rPr kumimoji="1" lang="en-US" altLang="zh-TW" dirty="0">
+            <a:pPr>
+              <a:spcBef>
+                <a:spcPts val="0"/>
+              </a:spcBef>
+            </a:pPr>
+            <a:r>
+              <a:rPr lang="en-US" altLang="zh-TW" sz="2000" dirty="0"/>
+              <a:t>Non-Virtualizable</a:t>
+            </a:r>
+            <a:r>
+              <a:rPr lang="zh-TW" altLang="en-US" sz="2000" dirty="0"/>
+              <a:t> </a:t>
+            </a:r>
+            <a:r>
+              <a:rPr lang="en-US" altLang="zh-TW" sz="2000" dirty="0"/>
+              <a:t>CPU</a:t>
+            </a:r>
+          </a:p>
+          <a:p>
+            <a:pPr lvl="1">
+              <a:spcBef>
+                <a:spcPts val="0"/>
+              </a:spcBef>
+            </a:pPr>
+            <a:r>
+              <a:rPr kumimoji="1" lang="en-US" altLang="zh-TW" sz="2000" dirty="0">
                 <a:latin typeface="Times New Roman" panose="02020603050405020304" pitchFamily="18" charset="0"/>
                 <a:cs typeface="Times New Roman" panose="02020603050405020304" pitchFamily="18" charset="0"/>
               </a:rPr>
               <a:t>Some</a:t>
             </a:r>
             <a:r>
-              <a:rPr kumimoji="1" lang="zh-TW" altLang="en-US" dirty="0">
-                <a:latin typeface="Times New Roman" panose="02020603050405020304" pitchFamily="18" charset="0"/>
-                <a:cs typeface="Times New Roman" panose="02020603050405020304" pitchFamily="18" charset="0"/>
-              </a:rPr>
-              <a:t> </a:t>
-            </a:r>
-            <a:r>
-              <a:rPr kumimoji="1" lang="en-US" altLang="zh-TW" dirty="0">
+              <a:rPr kumimoji="1" lang="zh-TW" altLang="en-US" sz="2000" dirty="0">
+                <a:latin typeface="Times New Roman" panose="02020603050405020304" pitchFamily="18" charset="0"/>
+                <a:cs typeface="Times New Roman" panose="02020603050405020304" pitchFamily="18" charset="0"/>
+              </a:rPr>
+              <a:t> </a:t>
+            </a:r>
+            <a:r>
+              <a:rPr kumimoji="1" lang="en-US" altLang="zh-TW" sz="2000" dirty="0">
                 <a:latin typeface="Times New Roman" panose="02020603050405020304" pitchFamily="18" charset="0"/>
                 <a:cs typeface="Times New Roman" panose="02020603050405020304" pitchFamily="18" charset="0"/>
               </a:rPr>
               <a:t>of</a:t>
             </a:r>
             <a:r>
-              <a:rPr kumimoji="1" lang="zh-TW" altLang="en-US" dirty="0">
-                <a:latin typeface="Times New Roman" panose="02020603050405020304" pitchFamily="18" charset="0"/>
-                <a:cs typeface="Times New Roman" panose="02020603050405020304" pitchFamily="18" charset="0"/>
-              </a:rPr>
-              <a:t> </a:t>
-            </a:r>
-            <a:r>
-              <a:rPr kumimoji="1" lang="en-US" altLang="zh-TW" dirty="0">
+              <a:rPr kumimoji="1" lang="zh-TW" altLang="en-US" sz="2000" dirty="0">
+                <a:latin typeface="Times New Roman" panose="02020603050405020304" pitchFamily="18" charset="0"/>
+                <a:cs typeface="Times New Roman" panose="02020603050405020304" pitchFamily="18" charset="0"/>
+              </a:rPr>
+              <a:t> </a:t>
+            </a:r>
+            <a:r>
+              <a:rPr kumimoji="1" lang="en-US" altLang="zh-TW" sz="2000" dirty="0">
                 <a:latin typeface="Times New Roman" panose="02020603050405020304" pitchFamily="18" charset="0"/>
                 <a:cs typeface="Times New Roman" panose="02020603050405020304" pitchFamily="18" charset="0"/>
               </a:rPr>
               <a:t>sensitive</a:t>
             </a:r>
             <a:r>
-              <a:rPr kumimoji="1" lang="zh-TW" altLang="en-US" dirty="0">
-                <a:latin typeface="Times New Roman" panose="02020603050405020304" pitchFamily="18" charset="0"/>
-                <a:cs typeface="Times New Roman" panose="02020603050405020304" pitchFamily="18" charset="0"/>
-              </a:rPr>
-              <a:t> </a:t>
-            </a:r>
-            <a:r>
-              <a:rPr kumimoji="1" lang="en-US" altLang="zh-TW" dirty="0">
+              <a:rPr kumimoji="1" lang="zh-TW" altLang="en-US" sz="2000" dirty="0">
+                <a:latin typeface="Times New Roman" panose="02020603050405020304" pitchFamily="18" charset="0"/>
+                <a:cs typeface="Times New Roman" panose="02020603050405020304" pitchFamily="18" charset="0"/>
+              </a:rPr>
+              <a:t> </a:t>
+            </a:r>
+            <a:r>
+              <a:rPr kumimoji="1" lang="en-US" altLang="zh-TW" sz="2000" dirty="0">
                 <a:latin typeface="Times New Roman" panose="02020603050405020304" pitchFamily="18" charset="0"/>
                 <a:cs typeface="Times New Roman" panose="02020603050405020304" pitchFamily="18" charset="0"/>
               </a:rPr>
               <a:t>instructions</a:t>
             </a:r>
             <a:r>
-              <a:rPr kumimoji="1" lang="zh-TW" altLang="en-US" dirty="0">
-                <a:latin typeface="Times New Roman" panose="02020603050405020304" pitchFamily="18" charset="0"/>
-                <a:cs typeface="Times New Roman" panose="02020603050405020304" pitchFamily="18" charset="0"/>
-              </a:rPr>
-              <a:t> </a:t>
-            </a:r>
-            <a:r>
-              <a:rPr kumimoji="1" lang="en-US" altLang="zh-TW" dirty="0">
+              <a:rPr kumimoji="1" lang="zh-TW" altLang="en-US" sz="2000" dirty="0">
+                <a:latin typeface="Times New Roman" panose="02020603050405020304" pitchFamily="18" charset="0"/>
+                <a:cs typeface="Times New Roman" panose="02020603050405020304" pitchFamily="18" charset="0"/>
+              </a:rPr>
+              <a:t> </a:t>
+            </a:r>
+            <a:r>
+              <a:rPr kumimoji="1" lang="en-US" altLang="zh-TW" sz="2000" dirty="0">
                 <a:latin typeface="Times New Roman" panose="02020603050405020304" pitchFamily="18" charset="0"/>
                 <a:cs typeface="Times New Roman" panose="02020603050405020304" pitchFamily="18" charset="0"/>
               </a:rPr>
               <a:t>are</a:t>
             </a:r>
             <a:r>
-              <a:rPr kumimoji="1" lang="zh-TW" altLang="en-US" dirty="0">
-                <a:latin typeface="Times New Roman" panose="02020603050405020304" pitchFamily="18" charset="0"/>
-                <a:cs typeface="Times New Roman" panose="02020603050405020304" pitchFamily="18" charset="0"/>
-              </a:rPr>
-              <a:t> </a:t>
-            </a:r>
-            <a:r>
-              <a:rPr kumimoji="1" lang="en-US" altLang="zh-TW" dirty="0">
+              <a:rPr kumimoji="1" lang="zh-TW" altLang="en-US" sz="2000" dirty="0">
+                <a:latin typeface="Times New Roman" panose="02020603050405020304" pitchFamily="18" charset="0"/>
+                <a:cs typeface="Times New Roman" panose="02020603050405020304" pitchFamily="18" charset="0"/>
+              </a:rPr>
+              <a:t> </a:t>
+            </a:r>
+            <a:r>
+              <a:rPr kumimoji="1" lang="en-US" altLang="zh-TW" sz="2000" dirty="0">
                 <a:latin typeface="Times New Roman" panose="02020603050405020304" pitchFamily="18" charset="0"/>
                 <a:cs typeface="Times New Roman" panose="02020603050405020304" pitchFamily="18" charset="0"/>
               </a:rPr>
               <a:t>privilege</a:t>
             </a:r>
             <a:r>
-              <a:rPr kumimoji="1" lang="zh-TW" altLang="en-US" dirty="0">
-                <a:latin typeface="Times New Roman" panose="02020603050405020304" pitchFamily="18" charset="0"/>
-                <a:cs typeface="Times New Roman" panose="02020603050405020304" pitchFamily="18" charset="0"/>
-              </a:rPr>
-              <a:t> </a:t>
-            </a:r>
-            <a:r>
-              <a:rPr kumimoji="1" lang="en-US" altLang="zh-TW" dirty="0">
-                <a:latin typeface="Times New Roman" panose="02020603050405020304" pitchFamily="18" charset="0"/>
-                <a:cs typeface="Times New Roman" panose="02020603050405020304" pitchFamily="18" charset="0"/>
-              </a:rPr>
-              <a:t>instructions. But some of sensitive instructions are non-privilege instructions.</a:t>
-            </a:r>
-          </a:p>
-          <a:p>
-            <a:r>
-              <a:rPr kumimoji="1" lang="en-US" altLang="zh-TW" dirty="0">
-                <a:latin typeface="Times New Roman" panose="02020603050405020304" pitchFamily="18" charset="0"/>
-                <a:cs typeface="Times New Roman" panose="02020603050405020304" pitchFamily="18" charset="0"/>
-              </a:rPr>
-              <a:t>We</a:t>
-            </a:r>
-            <a:r>
-              <a:rPr kumimoji="1" lang="zh-TW" altLang="en-US" dirty="0">
-                <a:latin typeface="Times New Roman" panose="02020603050405020304" pitchFamily="18" charset="0"/>
-                <a:cs typeface="Times New Roman" panose="02020603050405020304" pitchFamily="18" charset="0"/>
-              </a:rPr>
-              <a:t> </a:t>
-            </a:r>
-            <a:r>
-              <a:rPr kumimoji="1" lang="en-US" altLang="zh-TW" dirty="0">
-                <a:latin typeface="Times New Roman" panose="02020603050405020304" pitchFamily="18" charset="0"/>
-                <a:cs typeface="Times New Roman" panose="02020603050405020304" pitchFamily="18" charset="0"/>
-              </a:rPr>
-              <a:t>call</a:t>
-            </a:r>
-            <a:r>
-              <a:rPr kumimoji="1" lang="zh-TW" altLang="en-US" dirty="0">
-                <a:latin typeface="Times New Roman" panose="02020603050405020304" pitchFamily="18" charset="0"/>
-                <a:cs typeface="Times New Roman" panose="02020603050405020304" pitchFamily="18" charset="0"/>
-              </a:rPr>
-              <a:t> </a:t>
-            </a:r>
-            <a:r>
-              <a:rPr kumimoji="1" lang="en-US" altLang="zh-TW" dirty="0">
-                <a:latin typeface="Times New Roman" panose="02020603050405020304" pitchFamily="18" charset="0"/>
-                <a:cs typeface="Times New Roman" panose="02020603050405020304" pitchFamily="18" charset="0"/>
-              </a:rPr>
-              <a:t>this</a:t>
-            </a:r>
-            <a:r>
-              <a:rPr kumimoji="1" lang="zh-TW" altLang="en-US" dirty="0">
-                <a:latin typeface="Times New Roman" panose="02020603050405020304" pitchFamily="18" charset="0"/>
-                <a:cs typeface="Times New Roman" panose="02020603050405020304" pitchFamily="18" charset="0"/>
-              </a:rPr>
-              <a:t> </a:t>
-            </a:r>
-            <a:r>
-              <a:rPr kumimoji="1" lang="en-US" altLang="zh-TW" dirty="0">
-                <a:latin typeface="Times New Roman" panose="02020603050405020304" pitchFamily="18" charset="0"/>
-                <a:cs typeface="Times New Roman" panose="02020603050405020304" pitchFamily="18" charset="0"/>
-              </a:rPr>
-              <a:t>kind</a:t>
-            </a:r>
-            <a:r>
-              <a:rPr kumimoji="1" lang="zh-TW" altLang="en-US" dirty="0">
-                <a:latin typeface="Times New Roman" panose="02020603050405020304" pitchFamily="18" charset="0"/>
-                <a:cs typeface="Times New Roman" panose="02020603050405020304" pitchFamily="18" charset="0"/>
-              </a:rPr>
-              <a:t> </a:t>
-            </a:r>
-            <a:r>
-              <a:rPr kumimoji="1" lang="en-US" altLang="zh-TW" dirty="0">
-                <a:latin typeface="Times New Roman" panose="02020603050405020304" pitchFamily="18" charset="0"/>
-                <a:cs typeface="Times New Roman" panose="02020603050405020304" pitchFamily="18" charset="0"/>
-              </a:rPr>
-              <a:t>of</a:t>
-            </a:r>
-            <a:r>
-              <a:rPr kumimoji="1" lang="zh-TW" altLang="en-US" dirty="0">
-                <a:latin typeface="Times New Roman" panose="02020603050405020304" pitchFamily="18" charset="0"/>
-                <a:cs typeface="Times New Roman" panose="02020603050405020304" pitchFamily="18" charset="0"/>
-              </a:rPr>
-              <a:t> </a:t>
-            </a:r>
-            <a:r>
-              <a:rPr kumimoji="1" lang="en-US" altLang="zh-TW" dirty="0">
-                <a:latin typeface="Times New Roman" panose="02020603050405020304" pitchFamily="18" charset="0"/>
-                <a:cs typeface="Times New Roman" panose="02020603050405020304" pitchFamily="18" charset="0"/>
-              </a:rPr>
-              <a:t>CPU</a:t>
-            </a:r>
-            <a:r>
-              <a:rPr kumimoji="1" lang="zh-TW" altLang="en-US" dirty="0">
-                <a:latin typeface="Times New Roman" panose="02020603050405020304" pitchFamily="18" charset="0"/>
-                <a:cs typeface="Times New Roman" panose="02020603050405020304" pitchFamily="18" charset="0"/>
-              </a:rPr>
-              <a:t> </a:t>
-            </a:r>
-            <a:r>
-              <a:rPr kumimoji="1" lang="en-US" altLang="zh-TW" dirty="0">
-                <a:latin typeface="Times New Roman" panose="02020603050405020304" pitchFamily="18" charset="0"/>
-                <a:cs typeface="Times New Roman" panose="02020603050405020304" pitchFamily="18" charset="0"/>
-              </a:rPr>
-              <a:t>as</a:t>
-            </a:r>
-            <a:r>
-              <a:rPr kumimoji="1" lang="zh-TW" altLang="en-US" dirty="0">
-                <a:latin typeface="Times New Roman" panose="02020603050405020304" pitchFamily="18" charset="0"/>
-                <a:cs typeface="Times New Roman" panose="02020603050405020304" pitchFamily="18" charset="0"/>
-              </a:rPr>
-              <a:t> </a:t>
-            </a:r>
-            <a:r>
-              <a:rPr kumimoji="1" lang="en-US" altLang="zh-TW" dirty="0">
-                <a:latin typeface="Times New Roman" panose="02020603050405020304" pitchFamily="18" charset="0"/>
-                <a:cs typeface="Times New Roman" panose="02020603050405020304" pitchFamily="18" charset="0"/>
-              </a:rPr>
-              <a:t>“Non-Virtualizable</a:t>
-            </a:r>
-            <a:r>
-              <a:rPr kumimoji="1" lang="zh-TW" altLang="en-US" dirty="0">
-                <a:latin typeface="Times New Roman" panose="02020603050405020304" pitchFamily="18" charset="0"/>
-                <a:cs typeface="Times New Roman" panose="02020603050405020304" pitchFamily="18" charset="0"/>
-              </a:rPr>
-              <a:t> </a:t>
-            </a:r>
-            <a:r>
-              <a:rPr kumimoji="1" lang="en-US" altLang="zh-TW" dirty="0">
-                <a:latin typeface="Times New Roman" panose="02020603050405020304" pitchFamily="18" charset="0"/>
-                <a:cs typeface="Times New Roman" panose="02020603050405020304" pitchFamily="18" charset="0"/>
-              </a:rPr>
-              <a:t>CPU”</a:t>
-            </a:r>
-          </a:p>
-          <a:p>
-            <a:r>
-              <a:rPr kumimoji="1" lang="en-US" altLang="zh-TW" dirty="0">
+              <a:rPr kumimoji="1" lang="zh-TW" altLang="en-US" sz="2000" dirty="0">
+                <a:latin typeface="Times New Roman" panose="02020603050405020304" pitchFamily="18" charset="0"/>
+                <a:cs typeface="Times New Roman" panose="02020603050405020304" pitchFamily="18" charset="0"/>
+              </a:rPr>
+              <a:t> </a:t>
+            </a:r>
+            <a:r>
+              <a:rPr kumimoji="1" lang="en-US" altLang="zh-TW" sz="2000" dirty="0">
+                <a:latin typeface="Times New Roman" panose="02020603050405020304" pitchFamily="18" charset="0"/>
+                <a:cs typeface="Times New Roman" panose="02020603050405020304" pitchFamily="18" charset="0"/>
+              </a:rPr>
+              <a:t>instructions and some of sensitive instructions are non-privilege instructions.</a:t>
+            </a:r>
+          </a:p>
+          <a:p>
+            <a:pPr>
+              <a:spcBef>
+                <a:spcPts val="0"/>
+              </a:spcBef>
+            </a:pPr>
+            <a:r>
+              <a:rPr kumimoji="1" lang="en-US" altLang="zh-TW" sz="2000" dirty="0">
                 <a:latin typeface="Times New Roman" panose="02020603050405020304" pitchFamily="18" charset="0"/>
                 <a:cs typeface="Times New Roman" panose="02020603050405020304" pitchFamily="18" charset="0"/>
               </a:rPr>
               <a:t>For</a:t>
             </a:r>
             <a:r>
-              <a:rPr kumimoji="1" lang="zh-TW" altLang="en-US" dirty="0">
-                <a:latin typeface="Times New Roman" panose="02020603050405020304" pitchFamily="18" charset="0"/>
-                <a:cs typeface="Times New Roman" panose="02020603050405020304" pitchFamily="18" charset="0"/>
-              </a:rPr>
-              <a:t> </a:t>
-            </a:r>
-            <a:r>
-              <a:rPr kumimoji="1" lang="en-US" altLang="zh-TW" dirty="0">
+              <a:rPr kumimoji="1" lang="zh-TW" altLang="en-US" sz="2000" dirty="0">
+                <a:latin typeface="Times New Roman" panose="02020603050405020304" pitchFamily="18" charset="0"/>
+                <a:cs typeface="Times New Roman" panose="02020603050405020304" pitchFamily="18" charset="0"/>
+              </a:rPr>
+              <a:t> </a:t>
+            </a:r>
+            <a:r>
+              <a:rPr kumimoji="1" lang="en-US" altLang="zh-TW" sz="2000" dirty="0">
                 <a:latin typeface="Times New Roman" panose="02020603050405020304" pitchFamily="18" charset="0"/>
                 <a:cs typeface="Times New Roman" panose="02020603050405020304" pitchFamily="18" charset="0"/>
               </a:rPr>
@@ -8040,8 +7947,13 @@
             </a:r>
           </a:p>
           <a:p>
-            <a:r>
-              <a:rPr kumimoji="1" lang="en-US" altLang="zh-TW" dirty="0">
+            <a:pPr>
+              <a:spcBef>
+                <a:spcPts val="0"/>
+              </a:spcBef>
+            </a:pPr>
+            <a:r>
+              <a:rPr kumimoji="1" lang="en-US" altLang="zh-TW" sz="2000" dirty="0">
                 <a:latin typeface="Times New Roman" panose="02020603050405020304" pitchFamily="18" charset="0"/>
                 <a:cs typeface="Times New Roman" panose="02020603050405020304" pitchFamily="18" charset="0"/>
               </a:rPr>
@@ -8049,65 +7961,69 @@
             </a:r>
           </a:p>
           <a:p>
-            <a:pPr lvl="1"/>
-            <a:r>
-              <a:rPr kumimoji="1" lang="en-US" altLang="zh-TW" dirty="0">
+            <a:pPr lvl="1">
+              <a:spcBef>
+                <a:spcPts val="0"/>
+              </a:spcBef>
+            </a:pPr>
+            <a:r>
+              <a:rPr kumimoji="1" lang="en-US" altLang="zh-TW" sz="2000" dirty="0">
                 <a:latin typeface="Times New Roman" panose="02020603050405020304" pitchFamily="18" charset="0"/>
                 <a:cs typeface="Times New Roman" panose="02020603050405020304" pitchFamily="18" charset="0"/>
               </a:rPr>
               <a:t>For those privilege</a:t>
             </a:r>
             <a:r>
-              <a:rPr kumimoji="1" lang="zh-TW" altLang="en-US" dirty="0">
-                <a:latin typeface="Times New Roman" panose="02020603050405020304" pitchFamily="18" charset="0"/>
-                <a:cs typeface="Times New Roman" panose="02020603050405020304" pitchFamily="18" charset="0"/>
-              </a:rPr>
-              <a:t> </a:t>
-            </a:r>
-            <a:r>
-              <a:rPr kumimoji="1" lang="en-US" altLang="zh-TW" dirty="0">
+              <a:rPr kumimoji="1" lang="zh-TW" altLang="en-US" sz="2000" dirty="0">
+                <a:latin typeface="Times New Roman" panose="02020603050405020304" pitchFamily="18" charset="0"/>
+                <a:cs typeface="Times New Roman" panose="02020603050405020304" pitchFamily="18" charset="0"/>
+              </a:rPr>
+              <a:t> </a:t>
+            </a:r>
+            <a:r>
+              <a:rPr kumimoji="1" lang="en-US" altLang="zh-TW" sz="2000" dirty="0">
                 <a:latin typeface="Times New Roman" panose="02020603050405020304" pitchFamily="18" charset="0"/>
                 <a:cs typeface="Times New Roman" panose="02020603050405020304" pitchFamily="18" charset="0"/>
               </a:rPr>
               <a:t>and</a:t>
             </a:r>
             <a:r>
-              <a:rPr kumimoji="1" lang="zh-TW" altLang="en-US" dirty="0">
-                <a:latin typeface="Times New Roman" panose="02020603050405020304" pitchFamily="18" charset="0"/>
-                <a:cs typeface="Times New Roman" panose="02020603050405020304" pitchFamily="18" charset="0"/>
-              </a:rPr>
-              <a:t> </a:t>
-            </a:r>
-            <a:r>
-              <a:rPr kumimoji="1" lang="en-US" altLang="zh-TW" dirty="0">
+              <a:rPr kumimoji="1" lang="zh-TW" altLang="en-US" sz="2000" dirty="0">
+                <a:latin typeface="Times New Roman" panose="02020603050405020304" pitchFamily="18" charset="0"/>
+                <a:cs typeface="Times New Roman" panose="02020603050405020304" pitchFamily="18" charset="0"/>
+              </a:rPr>
+              <a:t> </a:t>
+            </a:r>
+            <a:r>
+              <a:rPr kumimoji="1" lang="en-US" altLang="zh-TW" sz="2000" dirty="0">
                 <a:latin typeface="Times New Roman" panose="02020603050405020304" pitchFamily="18" charset="0"/>
                 <a:cs typeface="Times New Roman" panose="02020603050405020304" pitchFamily="18" charset="0"/>
               </a:rPr>
               <a:t>sensitive</a:t>
             </a:r>
             <a:r>
-              <a:rPr kumimoji="1" lang="zh-TW" altLang="en-US" dirty="0">
-                <a:latin typeface="Times New Roman" panose="02020603050405020304" pitchFamily="18" charset="0"/>
-                <a:cs typeface="Times New Roman" panose="02020603050405020304" pitchFamily="18" charset="0"/>
-              </a:rPr>
-              <a:t> </a:t>
-            </a:r>
-            <a:r>
-              <a:rPr kumimoji="1" lang="en-US" altLang="zh-TW" dirty="0">
+              <a:rPr kumimoji="1" lang="zh-TW" altLang="en-US" sz="2000" dirty="0">
+                <a:latin typeface="Times New Roman" panose="02020603050405020304" pitchFamily="18" charset="0"/>
+                <a:cs typeface="Times New Roman" panose="02020603050405020304" pitchFamily="18" charset="0"/>
+              </a:rPr>
+              <a:t> </a:t>
+            </a:r>
+            <a:r>
+              <a:rPr kumimoji="1" lang="en-US" altLang="zh-TW" sz="2000" dirty="0">
                 <a:latin typeface="Times New Roman" panose="02020603050405020304" pitchFamily="18" charset="0"/>
                 <a:cs typeface="Times New Roman" panose="02020603050405020304" pitchFamily="18" charset="0"/>
               </a:rPr>
               <a:t>instructions, they (which</a:t>
             </a:r>
             <a:r>
-              <a:rPr kumimoji="1" lang="zh-TW" altLang="en-US" dirty="0">
-                <a:latin typeface="Times New Roman" panose="02020603050405020304" pitchFamily="18" charset="0"/>
-                <a:cs typeface="Times New Roman" panose="02020603050405020304" pitchFamily="18" charset="0"/>
-              </a:rPr>
-              <a:t> </a:t>
-            </a:r>
-            <a:r>
-              <a:rPr kumimoji="1" lang="en-US" altLang="zh-TW" dirty="0">
+              <a:rPr kumimoji="1" lang="zh-TW" altLang="en-US" sz="2000" dirty="0">
+                <a:latin typeface="Times New Roman" panose="02020603050405020304" pitchFamily="18" charset="0"/>
+                <a:cs typeface="Times New Roman" panose="02020603050405020304" pitchFamily="18" charset="0"/>
+              </a:rPr>
+              <a:t> </a:t>
+            </a:r>
+            <a:r>
+              <a:rPr kumimoji="1" lang="en-US" altLang="zh-TW" sz="2000" dirty="0">
                 <a:latin typeface="Times New Roman" panose="02020603050405020304" pitchFamily="18" charset="0"/>
                 <a:cs typeface="Times New Roman" panose="02020603050405020304" pitchFamily="18" charset="0"/>
               </a:rPr>
@@ -8115,9 +8031,13 @@
             </a:r>
           </a:p>
           <a:p>
-            <a:pPr lvl="1"/>
-            <a:r>
-              <a:rPr kumimoji="1" lang="en-US" altLang="zh-TW" dirty="0">
+            <a:pPr lvl="1">
+              <a:spcBef>
+                <a:spcPts val="0"/>
+              </a:spcBef>
+            </a:pPr>
+            <a:r>
+              <a:rPr kumimoji="1" lang="en-US" altLang="zh-TW" sz="2000" dirty="0">
                 <a:latin typeface="Times New Roman" panose="02020603050405020304" pitchFamily="18" charset="0"/>
                 <a:cs typeface="Times New Roman" panose="02020603050405020304" pitchFamily="18" charset="0"/>
               </a:rPr>
@@ -9198,13 +9118,18 @@
         <p:spPr>
           <a:xfrm>
             <a:off x="967338" y="758821"/>
-            <a:ext cx="7618396" cy="3928684"/>
+            <a:ext cx="7618396" cy="3525312"/>
           </a:xfrm>
         </p:spPr>
         <p:txBody>
           <a:bodyPr/>
           <a:lstStyle/>
           <a:p>
+            <a:pPr>
+              <a:spcBef>
+                <a:spcPts val="0"/>
+              </a:spcBef>
+            </a:pPr>
             <a:r>
               <a:rPr lang="en-US" sz="2400" dirty="0">
                 <a:latin typeface="Times New Roman" panose="02020603050405020304" pitchFamily="18" charset="0"/>
@@ -9214,7 +9139,11 @@
             </a:r>
           </a:p>
           <a:p>
-            <a:pPr lvl="1"/>
+            <a:pPr lvl="1">
+              <a:spcBef>
+                <a:spcPts val="0"/>
+              </a:spcBef>
+            </a:pPr>
             <a:r>
               <a:rPr lang="en-US" sz="2200" dirty="0">
                 <a:latin typeface="Times New Roman" panose="02020603050405020304" pitchFamily="18" charset="0"/>
@@ -9224,7 +9153,11 @@
             </a:r>
           </a:p>
           <a:p>
-            <a:pPr lvl="2"/>
+            <a:pPr lvl="2">
+              <a:spcBef>
+                <a:spcPts val="0"/>
+              </a:spcBef>
+            </a:pPr>
             <a:r>
               <a:rPr lang="en-US" dirty="0">
                 <a:latin typeface="Times New Roman" panose="02020603050405020304" pitchFamily="18" charset="0"/>
@@ -9234,7 +9167,11 @@
             </a:r>
           </a:p>
           <a:p>
-            <a:pPr lvl="2"/>
+            <a:pPr lvl="2">
+              <a:spcBef>
+                <a:spcPts val="0"/>
+              </a:spcBef>
+            </a:pPr>
             <a:r>
               <a:rPr lang="en-US" dirty="0">
                 <a:latin typeface="Times New Roman" panose="02020603050405020304" pitchFamily="18" charset="0"/>
@@ -9244,7 +9181,11 @@
             </a:r>
           </a:p>
           <a:p>
-            <a:pPr lvl="1"/>
+            <a:pPr lvl="1">
+              <a:spcBef>
+                <a:spcPts val="0"/>
+              </a:spcBef>
+            </a:pPr>
             <a:r>
               <a:rPr lang="en-US" sz="2200" dirty="0">
                 <a:latin typeface="Times New Roman" panose="02020603050405020304" pitchFamily="18" charset="0"/>
@@ -9254,7 +9195,11 @@
             </a:r>
           </a:p>
           <a:p>
-            <a:pPr lvl="2"/>
+            <a:pPr lvl="2">
+              <a:spcBef>
+                <a:spcPts val="0"/>
+              </a:spcBef>
+            </a:pPr>
             <a:r>
               <a:rPr lang="en-US" dirty="0">
                 <a:latin typeface="Times New Roman" panose="02020603050405020304" pitchFamily="18" charset="0"/>
@@ -9264,7 +9209,11 @@
             </a:r>
           </a:p>
           <a:p>
-            <a:pPr lvl="2"/>
+            <a:pPr lvl="2">
+              <a:spcBef>
+                <a:spcPts val="0"/>
+              </a:spcBef>
+            </a:pPr>
             <a:r>
               <a:rPr lang="en-US" dirty="0">
                 <a:latin typeface="Times New Roman" panose="02020603050405020304" pitchFamily="18" charset="0"/>
@@ -9274,7 +9223,11 @@
             </a:r>
           </a:p>
           <a:p>
-            <a:pPr lvl="1"/>
+            <a:pPr lvl="1">
+              <a:spcBef>
+                <a:spcPts val="0"/>
+              </a:spcBef>
+            </a:pPr>
             <a:r>
               <a:rPr lang="en-US" sz="2200" dirty="0">
                 <a:latin typeface="Times New Roman" panose="02020603050405020304" pitchFamily="18" charset="0"/>
@@ -9284,7 +9237,11 @@
             </a:r>
           </a:p>
           <a:p>
-            <a:pPr lvl="2"/>
+            <a:pPr lvl="2">
+              <a:spcBef>
+                <a:spcPts val="0"/>
+              </a:spcBef>
+            </a:pPr>
             <a:r>
               <a:rPr lang="en-US" dirty="0">
                 <a:latin typeface="Times New Roman" panose="02020603050405020304" pitchFamily="18" charset="0"/>
@@ -9294,7 +9251,11 @@
             </a:r>
           </a:p>
           <a:p>
-            <a:pPr lvl="2"/>
+            <a:pPr lvl="2">
+              <a:spcBef>
+                <a:spcPts val="0"/>
+              </a:spcBef>
+            </a:pPr>
             <a:r>
               <a:rPr lang="en-US" dirty="0">
                 <a:latin typeface="Times New Roman" panose="02020603050405020304" pitchFamily="18" charset="0"/>
@@ -9409,8 +9370,8 @@
         </p:nvSpPr>
         <p:spPr>
           <a:xfrm>
-            <a:off x="825901" y="789272"/>
-            <a:ext cx="7671334" cy="3811605"/>
+            <a:off x="897467" y="789272"/>
+            <a:ext cx="7340600" cy="3811605"/>
           </a:xfrm>
         </p:spPr>
         <p:txBody>
@@ -9487,7 +9448,7 @@
                 <a:latin typeface="Times New Roman" panose="02020603050405020304" pitchFamily="18" charset="0"/>
                 <a:cs typeface="Times New Roman" panose="02020603050405020304" pitchFamily="18" charset="0"/>
               </a:rPr>
-              <a:t>Shift traditional OS from kernel mode(Ring 0) to user mode(Ring 1), and run VMM in kernel mode.</a:t>
+              <a:t>Shift traditional OS from kernel mode (Ring 0) to user mode (Ring 1), and run VMM in kernel mode.</a:t>
             </a:r>
           </a:p>
           <a:p>
@@ -9694,13 +9655,13 @@
               </a:ext>
             </a:extLst>
           </a:blip>
-          <a:srcRect t="896"/>
+          <a:srcRect l="-4182" t="4398" r="-1" b="3170"/>
           <a:stretch/>
         </p:blipFill>
         <p:spPr bwMode="auto">
           <a:xfrm>
-            <a:off x="3532471" y="2702323"/>
-            <a:ext cx="2590089" cy="1888929"/>
+            <a:off x="3488267" y="2622553"/>
+            <a:ext cx="2319866" cy="1974850"/>
           </a:xfrm>
           <a:prstGeom prst="rect">
             <a:avLst/>
@@ -15221,7 +15182,7 @@
                 <a:latin typeface="Times New Roman" panose="02020603050405020304" pitchFamily="18" charset="0"/>
                 <a:cs typeface="Times New Roman" panose="02020603050405020304" pitchFamily="18" charset="0"/>
               </a:rPr>
-              <a:t>Some critical instructions should not be executed by guest OS.</a:t>
+              <a:t>Some critical instructions should not be executed by guest OS</a:t>
             </a:r>
           </a:p>
           <a:p>
@@ -16465,7 +16426,7 @@
           <a:lstStyle/>
           <a:p>
             <a:r>
-              <a:rPr lang="en-US" sz="2400" dirty="0">
+              <a:rPr lang="en-US" sz="2200" dirty="0">
                 <a:latin typeface="Times New Roman" panose="02020603050405020304" pitchFamily="18" charset="0"/>
                 <a:cs typeface="Times New Roman" panose="02020603050405020304" pitchFamily="18" charset="0"/>
               </a:rPr>
@@ -16748,8 +16709,8 @@
         </p:nvSpPr>
         <p:spPr>
           <a:xfrm>
-            <a:off x="900564" y="45539"/>
-            <a:ext cx="6343650" cy="570478"/>
+            <a:off x="885524" y="62473"/>
+            <a:ext cx="6358690" cy="570478"/>
           </a:xfrm>
         </p:spPr>
         <p:txBody>
@@ -17785,8 +17746,8 @@
         </p:nvSpPr>
         <p:spPr>
           <a:xfrm>
-            <a:off x="800087" y="844153"/>
-            <a:ext cx="7564267" cy="3671888"/>
+            <a:off x="875899" y="844153"/>
+            <a:ext cx="7488455" cy="3671888"/>
           </a:xfrm>
         </p:spPr>
         <p:txBody>
@@ -18186,8 +18147,8 @@
         </p:nvSpPr>
         <p:spPr>
           <a:xfrm>
-            <a:off x="837398" y="108349"/>
-            <a:ext cx="7838292" cy="519113"/>
+            <a:off x="924024" y="108349"/>
+            <a:ext cx="7751665" cy="519113"/>
           </a:xfrm>
         </p:spPr>
         <p:txBody>
@@ -30116,7 +30077,7 @@
                 <a:latin typeface="Times New Roman" panose="02020603050405020304" pitchFamily="18" charset="0"/>
                 <a:cs typeface="Times New Roman" panose="02020603050405020304" pitchFamily="18" charset="0"/>
               </a:rPr>
-              <a:t>Behavior sensitive instructions  </a:t>
+              <a:t>Behavior of sensitive instructions  </a:t>
             </a:r>
           </a:p>
           <a:p>
@@ -30126,7 +30087,7 @@
                 <a:latin typeface="Times New Roman" panose="02020603050405020304" pitchFamily="18" charset="0"/>
                 <a:cs typeface="Times New Roman" panose="02020603050405020304" pitchFamily="18" charset="0"/>
               </a:rPr>
-              <a:t>Those whose behavior or result depends on the configuration of resources (the content of the relocation register or the processor's mode)</a:t>
+              <a:t>Depend on the configuration of resources (the content of the relocation register or the processor's mode)</a:t>
             </a:r>
           </a:p>
         </p:txBody>

--- a/Slides/CSC6103/VT-03 CPU Virtualization.pptx
+++ b/Slides/CSC6103/VT-03 CPU Virtualization.pptx
@@ -284,7 +284,7 @@
             <a:fld id="{45BDCE37-E9BE-4280-8D68-34E43D66CEDB}" type="datetimeFigureOut">
               <a:rPr lang="zh-TW" altLang="en-US" smtClean="0"/>
               <a:pPr/>
-              <a:t>2026/9/24</a:t>
+              <a:t>2026/9/29</a:t>
             </a:fld>
             <a:endParaRPr lang="zh-TW" altLang="en-US"/>
           </a:p>
@@ -451,7 +451,7 @@
             <a:fld id="{FBFBA883-381C-409E-9635-BB54B21745E4}" type="datetimeFigureOut">
               <a:rPr lang="zh-TW" altLang="en-US" smtClean="0"/>
               <a:pPr/>
-              <a:t>2026/9/24</a:t>
+              <a:t>2026/9/29</a:t>
             </a:fld>
             <a:endParaRPr lang="zh-TW" altLang="en-US"/>
           </a:p>
@@ -16748,6 +16748,11 @@
           </a:bodyPr>
           <a:lstStyle/>
           <a:p>
+            <a:pPr>
+              <a:lnSpc>
+                <a:spcPct val="120000"/>
+              </a:lnSpc>
+            </a:pPr>
             <a:r>
               <a:rPr lang="en-US" dirty="0">
                 <a:latin typeface="Times New Roman" panose="02020603050405020304" pitchFamily="18" charset="0"/>
@@ -16756,25 +16761,11 @@
               <a:t>Intel introduces a more efficient hardware approach for register switching, VMCS </a:t>
             </a:r>
             <a:r>
-              <a:rPr lang="en-US" sz="1500" dirty="0">
-                <a:latin typeface="Times New Roman" panose="02020603050405020304" pitchFamily="18" charset="0"/>
-                <a:cs typeface="Times New Roman" panose="02020603050405020304" pitchFamily="18" charset="0"/>
-              </a:rPr>
-              <a:t>(</a:t>
-            </a:r>
-            <a:r>
-              <a:rPr lang="en-US" sz="1500" i="1" dirty="0">
-                <a:latin typeface="Times New Roman" panose="02020603050405020304" pitchFamily="18" charset="0"/>
-                <a:cs typeface="Times New Roman" panose="02020603050405020304" pitchFamily="18" charset="0"/>
-              </a:rPr>
-              <a:t>Virtual Machine Control Structure</a:t>
-            </a:r>
-            <a:r>
-              <a:rPr lang="en-US" sz="1500" dirty="0">
-                <a:latin typeface="Times New Roman" panose="02020603050405020304" pitchFamily="18" charset="0"/>
-                <a:cs typeface="Times New Roman" panose="02020603050405020304" pitchFamily="18" charset="0"/>
-              </a:rPr>
-              <a:t>) :</a:t>
+              <a:rPr lang="en-US" sz="2900" dirty="0">
+                <a:latin typeface="Times New Roman" panose="02020603050405020304" pitchFamily="18" charset="0"/>
+                <a:cs typeface="Times New Roman" panose="02020603050405020304" pitchFamily="18" charset="0"/>
+              </a:rPr>
+              <a:t>(Virtual Machine Control Structure) </a:t>
             </a:r>
           </a:p>
           <a:p>
